--- a/docs/community/marketing/decks/architect-phase2a/OCM-Sovereign-Delivery-Architect-External.pptx
+++ b/docs/community/marketing/decks/architect-phase2a/OCM-Sovereign-Delivery-Architect-External.pptx
@@ -20,6 +20,7 @@
     <p:sldId id="268" r:id="rId18"/>
     <p:sldId id="269" r:id="rId19"/>
     <p:sldId id="270" r:id="rId20"/>
+    <p:sldId id="271" r:id="rId21"/>
   </p:sldIdLst>
   <p:sldSz cx="18288000" cy="10287000"/>
   <p:notesSz cx="6858000" cy="9144000"/>
@@ -516,12 +517,12 @@
           <a:lstStyle/>
           <a:p>
             <a:r>
-              <a:t>Open with the observation, not the product.</a:t>
-            </a:r>
-          </a:p>
-          <a:p>
-            <a:r>
-              <a:t>Any release in the last six months: images, charts, configs, SBOMs — each named differently, each signed differently, if at all.</a:t>
+              <a:t>Open with the observation, not the product 'OCM'.</a:t>
+            </a:r>
+          </a:p>
+          <a:p>
+            <a:r>
+              <a:t>Any release in the last six months: images, charts, configs, SBOMs - each named differently, each signed differently, if at all.</a:t>
             </a:r>
           </a:p>
           <a:p>
@@ -536,7 +537,7 @@
           </a:p>
           <a:p>
             <a:r>
-              <a:t>No brand pitch yet — the deck does that at the end.</a:t>
+              <a:t>No brand pitch yet - the deck does that at the end.</a:t>
             </a:r>
           </a:p>
         </p:txBody>
@@ -606,27 +607,27 @@
           <a:lstStyle/>
           <a:p>
             <a:r>
-              <a:t>One mechanic, three patterns — covers every delivery topology you will see.</a:t>
-            </a:r>
-          </a:p>
-          <a:p>
-            <a:r>
-              <a:t>• Registry → Registry — promotion across dev/staging/prod, or cross-cloud GHCR → ECR. Same digests, every access rewritten.</a:t>
-            </a:r>
-          </a:p>
-          <a:p>
-            <a:r>
-              <a:t>• Registry → CTF — Common Transport Format. A local archive of blobs + index. Hand-carry across the boundary.</a:t>
-            </a:r>
-          </a:p>
-          <a:p>
-            <a:r>
-              <a:t>• CTF → Registry — the air-gap import. Archive arrives, `ocm transfer` uploads, access rewrites to local registry, signature verifies locally. No traffic to source.</a:t>
-            </a:r>
-          </a:p>
-          <a:p>
-            <a:r>
-              <a:t>Same command in all three: `ocm transfer cv &lt;src&gt; &lt;dst&gt;` or `ocm transfer ctf &lt;src&gt; &lt;dst&gt;`. Access changes; digests do not. Signature covers digests, so it survives every hop. Verification is purely local at the destination — that is the air-gap property.</a:t>
+              <a:t>One mechanic, three patterns - covers every delivery topology you will see.</a:t>
+            </a:r>
+          </a:p>
+          <a:p>
+            <a:r>
+              <a:t>• Registry -&gt; Registry - promotion across dev/staging/prod, or cross-cloud GHCR -&gt; ECR. Same digests, every access rewritten.</a:t>
+            </a:r>
+          </a:p>
+          <a:p>
+            <a:r>
+              <a:t>• Registry -&gt; CTF - Common Transport Format. A local archive of blobs + index. Hand-carry across the boundary.</a:t>
+            </a:r>
+          </a:p>
+          <a:p>
+            <a:r>
+              <a:t>• CTF -&gt; Registry - the air-gap import. Archive arrives, `ocm transfer` uploads, access rewrites to local registry, signature verifies locally. No traffic to source.</a:t>
+            </a:r>
+          </a:p>
+          <a:p>
+            <a:r>
+              <a:t>Same command in all three: `ocm transfer cv &lt;src&gt; &lt;dst&gt;`. Access changes; digests do not. Signature covers digests, so it survives every hop. Verification is purely local at the destination - that is the air-gap property.</a:t>
             </a:r>
           </a:p>
         </p:txBody>
@@ -696,37 +697,42 @@
           <a:lstStyle/>
           <a:p>
             <a:r>
-              <a:t>OCM controllers verify and apply the component. One mirrors.</a:t>
-            </a:r>
-          </a:p>
-          <a:p>
-            <a:r>
-              <a:t>• Repository — names where component versions live. OCI registry, mounted CTF, S3, local FS.</a:t>
-            </a:r>
-          </a:p>
-          <a:p>
-            <a:r>
-              <a:t>• Component — names a specific component version. Pulls the descriptor and verifies its signature.</a:t>
-            </a:r>
-          </a:p>
-          <a:p>
-            <a:r>
-              <a:t>• Resource — picks one artifact from the verified component, by digest: Helm chart, OCI image, raw manifest, blob.</a:t>
-            </a:r>
-          </a:p>
-          <a:p>
-            <a:r>
-              <a:t>• Deployer — applies the resource to the cluster. Built-in for raw manifests; Flux for HelmRelease; Argo for Application.</a:t>
-            </a:r>
-          </a:p>
-          <a:p>
-            <a:r>
-              <a:t>Then point at the offset card below the chain: Replication. Sits ALONGSIDE the chain, not within it. References a source `Component` and a target `Repository`; when the source's resolved version changes, transfers that version with its full reference graph into the target. Equivalent of `ocm transfer` as a controller. Records `status.lastTransferredDigest`; same digest = no-op. Fits delivery pipelines, promotion between environments, air-gap mirroring.</a:t>
-            </a:r>
-          </a:p>
-          <a:p>
-            <a:r>
-              <a:t>Anti-lock-in answer: the Deployer tier is pluggable — built-in, Flux, or Argo. Slide 14 flags the only real sharp edges that remain.</a:t>
+              <a:t>Four CRs, one chain. The controllers verify and apply the component.</a:t>
+            </a:r>
+          </a:p>
+          <a:p>
+            <a:r>
+              <a:t>• Repository - names where component versions live. OCI registry, mounted CTF, S3, local FS.</a:t>
+            </a:r>
+          </a:p>
+          <a:p>
+            <a:r>
+              <a:t>• Component - names a specific component version. Pulls the descriptor and verifies its signature.</a:t>
+            </a:r>
+          </a:p>
+          <a:p>
+            <a:r>
+              <a:t>• Resource - picks one artifact from the verified component, by digest: Helm chart, OCI image, raw manifest, blob.</a:t>
+            </a:r>
+          </a:p>
+          <a:p>
+            <a:r>
+              <a:t>• Deployer - applies the resource to the cluster. Resolves image refs from the verified descriptor at apply time - that is where localization happens. Built-in for raw manifests; Flux for HelmRelease; Argo for Application.</a:t>
+            </a:r>
+          </a:p>
+          <a:p>
+            <a:r>
+              <a:t>Anti-lock-in: the Deployer tier is pluggable - built-in, Flux, or Argo - so OCM doesn't fight the reconciliation engine you already run.</a:t>
+            </a:r>
+          </a:p>
+          <a:p>
+            <a:r>
+              <a:t>Q&amp;A backup: a fifth CR, `Replication`, sits alongside the chain (not within it) and mirrors a version from one repository to another - the controller-shaped equivalent of `ocm transfer cv`. Optional appendix slide if it comes up.</a:t>
+            </a:r>
+          </a:p>
+          <a:p>
+            <a:r>
+              <a:t>Slide 14 flags the only real sharp edges that remain.</a:t>
             </a:r>
           </a:p>
         </p:txBody>
@@ -801,7 +807,7 @@
           </a:p>
           <a:p>
             <a:r>
-              <a:t>The product is `acme.org/sovereign/product`. Day 1 references notes 1.0.0 and postgres 1.0.0. The notes team ships a patch — 1.0.0 → 1.1.0. The platform team raises the product to 1.1.0 and updates the notes reference. Postgres stays.</a:t>
+              <a:t>The product is `acme.org/sovereign/product`. Day 1 references notes 1.0.0 and postgres 1.0.0. The notes team ships a patch - 1.0.0 -&gt; 1.1.0. The platform team raises the product to 1.1.0 and updates the notes reference. Postgres stays.</a:t>
             </a:r>
           </a:p>
           <a:p>
@@ -891,17 +897,17 @@
           </a:p>
           <a:p>
             <a:r>
-              <a:t>• From zero — CLI. No cluster needed. Install CLI. Take one component you already ship. Write the constructor. Pack. Sign with RSA. Export as CTF. Carry to a second machine. Import. Verify. Round trip in 30 minutes. Recommend this first.</a:t>
-            </a:r>
-          </a:p>
-          <a:p>
-            <a:r>
-              <a:t>• On your cluster — controllers. Four K8s deployments, helm-install on any cluster. Point at your registry. Apply a Component resource — verified and reconciling.</a:t>
-            </a:r>
-          </a:p>
-          <a:p>
-            <a:r>
-              <a:t>Both paths coexist with what you already run — cosign, Argo, Flux, Kyverno. OCM signs the descriptor; your existing controls stay in place.</a:t>
+              <a:t>• From zero - CLI. No cluster needed. Install CLI. Take one component you already ship. Write the constructor. Pack. Sign with RSA. Export as CTF. Carry to a second machine. Import. Verify. Round trip in 30 minutes. Recommend this first.</a:t>
+            </a:r>
+          </a:p>
+          <a:p>
+            <a:r>
+              <a:t>• On your cluster - controllers. Four K8s deployments, helm-install on any cluster. Point at your registry. Apply a Component resource - verified and reconciling.</a:t>
+            </a:r>
+          </a:p>
+          <a:p>
+            <a:r>
+              <a:t>Both paths coexist with what you already run - cosign, Argo, Flux, Kyverno. OCM signs the descriptor; your existing controls stay in place.</a:t>
             </a:r>
           </a:p>
         </p:txBody>
@@ -976,12 +982,17 @@
           </a:p>
           <a:p>
             <a:r>
-              <a:t>• Transfer defaults — copies only the descriptor. For air-gap, pass --copy-resources so the bytes travel too.</a:t>
-            </a:r>
-          </a:p>
-          <a:p>
-            <a:r>
-              <a:t>• Controllers v1alpha1 — CRD shapes for Repository/Component/Resource/Deployer are stabilising but still v1alpha1. Pin minor versions in your platform install.</a:t>
+              <a:t>• Transfer defaults - copies only the descriptor. For air-gap, pass --copy-resources so the bytes travel too.</a:t>
+            </a:r>
+          </a:p>
+          <a:p>
+            <a:r>
+              <a:t>• Controllers v1alpha1 - CRD shapes for Repository/Component/Resource/Deployer are stabilising but still v1alpha1. Pin minor versions in your platform install.</a:t>
+            </a:r>
+          </a:p>
+          <a:p>
+            <a:r>
+              <a:t>• PEM-encoded RSA (X.509 cert chains) is experimental - the CLI prints `experimental` warnings on sign and verify. Plain RSA, GPG, and Sigstore are stable on the same v1alpha1 surface; PEM may still shift.</a:t>
             </a:r>
           </a:p>
           <a:p>
@@ -1056,32 +1067,122 @@
           <a:lstStyle/>
           <a:p>
             <a:r>
-              <a:t>Close with the ask. Three doors.</a:t>
-            </a:r>
-          </a:p>
-          <a:p>
-            <a:r>
-              <a:t>• Try it — `ocm.software`. Install the CLI, walk the getting-started, pack one of your own. You will know within an afternoon if OCM fits.</a:t>
-            </a:r>
-          </a:p>
-          <a:p>
-            <a:r>
-              <a:t>• Build with us — `github.com/open-component-model`. Spec, implementation, conformance suite, roadmap. All in the open. File issues; tell us what you build on top.</a:t>
-            </a:r>
-          </a:p>
-          <a:p>
-            <a:r>
-              <a:t>• Talk to us — `#open-component-model` on the CNCF Slack. Maintainers, customers, foundation governance.</a:t>
-            </a:r>
-          </a:p>
-          <a:p>
-            <a:r>
-              <a:t>Not selling OCM. Stewarding a standard under NeoNephos Foundation governance. The more voices while it is being shaped, the better the standard gets.</a:t>
-            </a:r>
-          </a:p>
-          <a:p>
-            <a:r>
-              <a:t>Ship the release as one unit. Thank you — questions.</a:t>
+              <a:t>Close with the ask. Three doors, architect-shaped.</a:t>
+            </a:r>
+          </a:p>
+          <a:p>
+            <a:r>
+              <a:t>• Evaluate - `ocm.software`. Read the spec, run the conformance scenario at `conformance/scenarios/sovereign`, judge fit. You will know within an afternoon if OCM fits.</a:t>
+            </a:r>
+          </a:p>
+          <a:p>
+            <a:r>
+              <a:t>• Pilot - `github.com/open-component-model`. Take one product, one team, scoped scope of work. Spec, implementation, conformance suite, roadmap - all in the open.</a:t>
+            </a:r>
+          </a:p>
+          <a:p>
+            <a:r>
+              <a:t>• Engage - community channels on the website. We're stewarding a standard under NeoNephos Foundation governance. The more voices while it's being shaped, the better the standard gets.</a:t>
+            </a:r>
+          </a:p>
+          <a:p>
+            <a:r>
+              <a:t>Not selling OCM. Stewarding it as a multi-vendor standard. Ship the release as one unit. Thank you - questions.</a:t>
+            </a:r>
+          </a:p>
+        </p:txBody>
+      </p:sp>
+      <p:sp>
+        <p:nvSpPr>
+          <p:cNvPr id="4" name="Slide Number Placeholder 3"/>
+          <p:cNvSpPr>
+            <a:spLocks noGrp="1"/>
+          </p:cNvSpPr>
+          <p:nvPr>
+            <p:ph type="sldNum" idx="5" sz="quarter"/>
+          </p:nvPr>
+        </p:nvSpPr>
+        <p:spPr/>
+      </p:sp>
+    </p:spTree>
+  </p:cSld>
+  <p:clrMapOvr>
+    <a:masterClrMapping/>
+  </p:clrMapOvr>
+</p:notes>
+</file>
+
+<file path=ppt/notesSlides/notesSlide16.xml><?xml version="1.0" encoding="utf-8"?>
+<p:notes xmlns:a="http://schemas.openxmlformats.org/drawingml/2006/main" xmlns:p="http://schemas.openxmlformats.org/presentationml/2006/main" xmlns:r="http://schemas.openxmlformats.org/officeDocument/2006/relationships">
+  <p:cSld>
+    <p:spTree>
+      <p:nvGrpSpPr>
+        <p:cNvPr id="1" name=""/>
+        <p:cNvGrpSpPr/>
+        <p:nvPr/>
+      </p:nvGrpSpPr>
+      <p:grpSpPr>
+        <a:xfrm>
+          <a:off x="0" y="0"/>
+          <a:ext cx="0" cy="0"/>
+          <a:chOff x="0" y="0"/>
+          <a:chExt cx="0" cy="0"/>
+        </a:xfrm>
+      </p:grpSpPr>
+      <p:sp>
+        <p:nvSpPr>
+          <p:cNvPr id="2" name="Slide Image Placeholder 1"/>
+          <p:cNvSpPr>
+            <a:spLocks noGrp="1"/>
+          </p:cNvSpPr>
+          <p:nvPr>
+            <p:ph type="sldImg" idx="2"/>
+          </p:nvPr>
+        </p:nvSpPr>
+        <p:spPr/>
+      </p:sp>
+      <p:sp>
+        <p:nvSpPr>
+          <p:cNvPr id="3" name="Notes Placeholder 2"/>
+          <p:cNvSpPr>
+            <a:spLocks noGrp="1"/>
+          </p:cNvSpPr>
+          <p:nvPr>
+            <p:ph type="body" idx="3" sz="quarter"/>
+          </p:nvPr>
+        </p:nvSpPr>
+        <p:spPr/>
+        <p:txBody>
+          <a:bodyPr/>
+          <a:lstStyle/>
+          <a:p>
+            <a:r>
+              <a:t>APPENDIX — pull only if asked about cluster-side mirroring or 'how do I get a version from one repo into another without running the CLI?'.</a:t>
+            </a:r>
+          </a:p>
+          <a:p>
+            <a:r>
+              <a:t>A fifth controller, `Replication`, sits alongside the four-card chain - not within it. Where the chain delivers content INTO the cluster, Replication transfers a resolved component version FROM one OCM repository TO another. Same descriptor, same digests, fresh access fields.</a:t>
+            </a:r>
+          </a:p>
+          <a:p>
+            <a:r>
+              <a:t>References a source `Component` CR and a target `Repository` CR. When the source's resolved version changes, transfers that version with its full reference graph into the target.</a:t>
+            </a:r>
+          </a:p>
+          <a:p>
+            <a:r>
+              <a:t>Mirrors the behavior of `ocm transfer cv` on the OCM CLI. Records `status.lastTransferredDigest` after each successful run; a later reconciliation seeing the same digest is a no-op.</a:t>
+            </a:r>
+          </a:p>
+          <a:p>
+            <a:r>
+              <a:t>Use cases: delivery pipelines, promotion between environments, air-gap mirroring kept in-cluster rather than on a workstation.</a:t>
+            </a:r>
+          </a:p>
+          <a:p>
+            <a:r>
+              <a:t>Not on the main deck because the four-card chain is the load-bearing story for a 30-minute architect talk. This is the answer to a specific question, not part of the arc.</a:t>
             </a:r>
           </a:p>
         </p:txBody>
@@ -1156,22 +1257,22 @@
           </a:p>
           <a:p>
             <a:r>
-              <a:t>• OCI image — `repo:tag` or `repo@sha256:…`. Mirror it, every downstream reference must be rewritten.</a:t>
-            </a:r>
-          </a:p>
-          <a:p>
-            <a:r>
-              <a:t>• Helm chart — repo URL + chart name + version. Move the repo, every `helm install` breaks.</a:t>
-            </a:r>
-          </a:p>
-          <a:p>
-            <a:r>
-              <a:t>• SBOM — no stable identifier of its own. Tied by filename or referrer; repackage and it dangles.</a:t>
-            </a:r>
-          </a:p>
-          <a:p>
-            <a:r>
-              <a:t>Calibration for cosign shops: keep signing each piece. What is missing is a name for the release as one unit, signable, verifiable in a sovereign zone with no callback.</a:t>
+              <a:t>• OCI image - `repo:tag` or `repo@sha256:…`. Mirror it, every downstream reference must be rewritten.</a:t>
+            </a:r>
+          </a:p>
+          <a:p>
+            <a:r>
+              <a:t>• Helm chart - repo URL + chart name + version. Move the repo, every `helm install` breaks.</a:t>
+            </a:r>
+          </a:p>
+          <a:p>
+            <a:r>
+              <a:t>• SBOM - no stable identifier of its own. Tied by filename or referrer; repackage and it dangles.</a:t>
+            </a:r>
+          </a:p>
+          <a:p>
+            <a:r>
+              <a:t>Calibration for COSIGN (which can update the digest after explicit `cosign copy`): keep signing each piece. What is missing is a name for the release as one unit, signable, verifiable in a sovereign zone with no callback.</a:t>
             </a:r>
           </a:p>
           <a:p>
@@ -1251,22 +1352,22 @@
           </a:p>
           <a:p>
             <a:r>
-              <a:t>• Coordinates — DNS-style name plus SemVer. Globally unique, location-agnostic. No registry in the name.</a:t>
-            </a:r>
-          </a:p>
-          <a:p>
-            <a:r>
-              <a:t>• Digest — SHA-256 over each resource. Computed at pack time. This is what we sign.</a:t>
-            </a:r>
-          </a:p>
-          <a:p>
-            <a:r>
-              <a:t>• Access — type plus fetch fields (`OCIImage/v1`, `LocalBlob/v1`, `S3/v1`). Where the bytes currently live.</a:t>
-            </a:r>
-          </a:p>
-          <a:p>
-            <a:r>
-              <a:t>Promote EU → US → air-gapped CTF: coordinate stays, digest stays, only access is rewritten. Signature still verifies — anywhere.</a:t>
+              <a:t>• Component identity - DNS-style name plus SemVer. Globally unique, location-agnostic. No registry in the name.</a:t>
+            </a:r>
+          </a:p>
+          <a:p>
+            <a:r>
+              <a:t>• Digest - SHA-256 over each resource. Computed at pack time. This is what we sign.</a:t>
+            </a:r>
+          </a:p>
+          <a:p>
+            <a:r>
+              <a:t>• Access - type plus fetch fields (`OCIImage/v1`, `Helm/v1`, `LocalBlob/v1`). Where the bytes currently live.</a:t>
+            </a:r>
+          </a:p>
+          <a:p>
+            <a:r>
+              <a:t>Promote EU -&gt; US -&gt; air-gapped CTF and DEV -&gt; STAGING -&gt; PROD : identity stays, digest stays, only access is rewritten. Signature still verifies - anywhere.</a:t>
             </a:r>
           </a:p>
           <a:p>
@@ -1341,27 +1442,27 @@
           <a:lstStyle/>
           <a:p>
             <a:r>
-              <a:t>Two jobs: pre-empt 'what does this replace?' and define the noun the rest of the deck rests on.</a:t>
-            </a:r>
-          </a:p>
-          <a:p>
-            <a:r>
-              <a:t>OCM is not a replacement for OCI, Helm, or your SBOM tooling. It composes around them and adds one new thing — the component.</a:t>
-            </a:r>
-          </a:p>
-          <a:p>
-            <a:r>
-              <a:t>• Any format — Helm stays Helm, OCI stays OCI, SBOM stays SPDX/CycloneDX. Each becomes a resource inside the component.</a:t>
-            </a:r>
-          </a:p>
-          <a:p>
-            <a:r>
-              <a:t>• Any location — name and version do not encode a registry. Move it; the name stays.</a:t>
-            </a:r>
-          </a:p>
-          <a:p>
-            <a:r>
-              <a:t>• One signature — covers every digest in the component. The whole release is one signed unit.</a:t>
+              <a:t>Two jobs: pre-empt 'what does this replace?' and define the noun 'COMPONENT' the rest of the deck rests on.</a:t>
+            </a:r>
+          </a:p>
+          <a:p>
+            <a:r>
+              <a:t>OCM is not a replacement for OCI, Helm, or your SBOM tooling. It composes around them and adds one new thing - the component.</a:t>
+            </a:r>
+          </a:p>
+          <a:p>
+            <a:r>
+              <a:t>• Any format - Helm stays Helm, OCI stays OCI, configs stay configs. The artifact `type:` is free-form; access types are pluggable. SBOMs and other formats slot in via the same mechanism.</a:t>
+            </a:r>
+          </a:p>
+          <a:p>
+            <a:r>
+              <a:t>• Any location - name and version do not encode a registry. Move it; the name stays.</a:t>
+            </a:r>
+          </a:p>
+          <a:p>
+            <a:r>
+              <a:t>• One signature - covers every digest in the component. The whole release is one signed unit.</a:t>
             </a:r>
           </a:p>
           <a:p>
@@ -1436,32 +1537,32 @@
           <a:lstStyle/>
           <a:p>
             <a:r>
-              <a:t>First YAML the audience sees. Walk it like you would for a colleague — eighteen lines, hand-written.</a:t>
-            </a:r>
-          </a:p>
-          <a:p>
-            <a:r>
-              <a:t>• `components` — list, usually one. Name is DNS-style; version is SemVer.</a:t>
-            </a:r>
-          </a:p>
-          <a:p>
-            <a:r>
-              <a:t>• `provider` — metadata, required.</a:t>
-            </a:r>
-          </a:p>
-          <a:p>
-            <a:r>
-              <a:t>• `resources` — every artifact in the release. Two ways in:</a:t>
-            </a:r>
-          </a:p>
-          <a:p>
-            <a:r>
-              <a:t>  ▪ `input:` — by value. Constructor reads the file at pack time, embeds the bytes. Travels in the archive.</a:t>
-            </a:r>
-          </a:p>
-          <a:p>
-            <a:r>
-              <a:t>  ▪ `access:` — by reference. Records a pointer (e.g. `ghcr.io/.../podinfo:6.9.1`), resolves digest now, copies bytes later.</a:t>
+              <a:t>First YAML the audience sees. Walk it like you would for a colleague - eighteen lines, hand-written.</a:t>
+            </a:r>
+          </a:p>
+          <a:p>
+            <a:r>
+              <a:t>• `components` - list, usually one. Name is DNS-style; version is SemVer.</a:t>
+            </a:r>
+          </a:p>
+          <a:p>
+            <a:r>
+              <a:t>• `provider` - metadata, required.</a:t>
+            </a:r>
+          </a:p>
+          <a:p>
+            <a:r>
+              <a:t>• `resources` - every artifact in the release. Two ways in:</a:t>
+            </a:r>
+          </a:p>
+          <a:p>
+            <a:r>
+              <a:t>  ▪ `input:` - by value. Constructor reads the file at pack time, embeds the bytes. Travels in the archive.</a:t>
+            </a:r>
+          </a:p>
+          <a:p>
+            <a:r>
+              <a:t>  ▪ `access:` - by reference. Records a pointer (e.g. `ghcr.io/.../podinfo:6.9.1`), resolves digest now, copies bytes later.</a:t>
             </a:r>
           </a:p>
           <a:p>
@@ -1546,27 +1647,27 @@
           </a:p>
           <a:p>
             <a:r>
-              <a:t>We show one resource — the image — to keep focus on the mechanism. Real components carry many resources and may reference other components; the '...' line stands in for that.</a:t>
-            </a:r>
-          </a:p>
-          <a:p>
-            <a:r>
-              <a:t>• `access` — `OCIImage/v1` with the imageReference pinned to a digest. Kills the repoint-the-tag attack class. Excluded from the canonical form on purpose — transport rewrites it.</a:t>
-            </a:r>
-          </a:p>
-          <a:p>
-            <a:r>
-              <a:t>• `digest` — SHA-256 over the resource bytes. Computed at pack time. Input to the descriptor hash.</a:t>
-            </a:r>
-          </a:p>
-          <a:p>
-            <a:r>
-              <a:t>• `signatures:` — list. Each entry signs ONE hash: the SHA-256 of the canonicalized descriptor. That single hash covers every resource digest. Multiple signatures allowed — dual-sign RSA + Sigstore, verifiers pick.</a:t>
-            </a:r>
-          </a:p>
-          <a:p>
-            <a:r>
-              <a:t>Three things to land. Signed: the descriptor hash — so one signature covers every artifact in the component. Not signed: the access fields — so transport can rewrite them freely. The signature still verifies, anywhere.</a:t>
+              <a:t>We show one resource - the image - to keep focus on the mechanism. Real components carry many resources and may reference other components; the '...' line stands in for that.</a:t>
+            </a:r>
+          </a:p>
+          <a:p>
+            <a:r>
+              <a:t>• `access` - `OCIImage/v1` with the imageReference pinned to a digest. Kills the repoint-the-tag attack class. Excluded from the canonical form on purpose - transport rewrites it.</a:t>
+            </a:r>
+          </a:p>
+          <a:p>
+            <a:r>
+              <a:t>• `digest` - SHA-256 over the resource bytes. Computed at pack time. Input to the descriptor hash.</a:t>
+            </a:r>
+          </a:p>
+          <a:p>
+            <a:r>
+              <a:t>• `signatures:` - list. Each entry signs ONE hash: the SHA-256 of the canonicalized descriptor. That single hash covers every resource digest. Multiple signatures allowed - dual-sign RSA + Sigstore, verifiers pick.</a:t>
+            </a:r>
+          </a:p>
+          <a:p>
+            <a:r>
+              <a:t>Three things to land. Signed: the descriptor hash - so one signature covers every artifact in the component. Not signed: the access fields - so transport can rewrite them freely. The signature still verifies, anywhere.</a:t>
             </a:r>
           </a:p>
           <a:p>
@@ -1646,37 +1747,37 @@
           </a:p>
           <a:p>
             <a:r>
-              <a:t>The signed descriptor is itself an OCI artifact — media type `application/vnd.ocm.software.component-descriptor.v2`. Lives in your registry next to the images. No new infrastructure.</a:t>
-            </a:r>
-          </a:p>
-          <a:p>
-            <a:r>
-              <a:t>Four verbs, same flow, every component:</a:t>
-            </a:r>
-          </a:p>
-          <a:p>
-            <a:r>
-              <a:t>• Pack — bundle once, name once.</a:t>
-            </a:r>
-          </a:p>
-          <a:p>
-            <a:r>
-              <a:t>• Sign — one signature covers every digest.</a:t>
-            </a:r>
-          </a:p>
-          <a:p>
-            <a:r>
-              <a:t>• Transport — registry ↔ registry ↔ tarball. Signature survives every hop.</a:t>
-            </a:r>
-          </a:p>
-          <a:p>
-            <a:r>
-              <a:t>• Deploy — controller verifies, resolves digests, applies. No callback upstream.</a:t>
-            </a:r>
-          </a:p>
-          <a:p>
-            <a:r>
-              <a:t>Sovereign cloud, air-gap, customer cluster. Next four slides are the mechanics.</a:t>
+              <a:t>The signed descriptor is itself an OCI artifact - media type `application/vnd.ocm.software.component-descriptor.v2`. Lives in your registry next to the images. No new infrastructure.</a:t>
+            </a:r>
+          </a:p>
+          <a:p>
+            <a:r>
+              <a:t>Four moves, same flow, every component:</a:t>
+            </a:r>
+          </a:p>
+          <a:p>
+            <a:r>
+              <a:t>• Pack - bundle once, name once.</a:t>
+            </a:r>
+          </a:p>
+          <a:p>
+            <a:r>
+              <a:t>• Sign - one signature covers every digest.</a:t>
+            </a:r>
+          </a:p>
+          <a:p>
+            <a:r>
+              <a:t>• Transport - registry ↔ registry ↔ tarball. Signature survives every hop.</a:t>
+            </a:r>
+          </a:p>
+          <a:p>
+            <a:r>
+              <a:t>• Deploy - controller verifies, resolves digests, applies. No callback upstream.</a:t>
+            </a:r>
+          </a:p>
+          <a:p>
+            <a:r>
+              <a:t>These are lifecycle moves, not CLI verbs. The CLI you'll type is `ocm add cv`, `ocm sign cv`, `ocm transfer cv`, then `kubectl apply` against the Deployer CR. Same four moves, slightly different names. Sovereign cloud, air-gap, customer cluster. Next four slides are the mechanics.</a:t>
             </a:r>
           </a:p>
         </p:txBody>
@@ -1751,22 +1852,22 @@
           </a:p>
           <a:p>
             <a:r>
-              <a:t>• Leaf components carry resources — images, charts, configs, SBOMs. Walk the LEFT box: `acme.org/sovereign/notes` and `acme.org/sovereign/postgres`, each with image + chart + `...` (real components carry more — configs, SBOMs — the `...` stands for that).</a:t>
-            </a:r>
-          </a:p>
-          <a:p>
-            <a:r>
-              <a:t>• A product or release component composes leaves via `componentReferences:` — name + version, no resources of its own. Walk the RIGHT box: `acme.org/sovereign/product` references both notes and postgres by name and version. Nothing else.</a:t>
-            </a:r>
-          </a:p>
-          <a:p>
-            <a:r>
-              <a:t>• Each leaf is independently versioned, signed, transferable. The product is a small descriptor that points at them.</a:t>
-            </a:r>
-          </a:p>
-          <a:p>
-            <a:r>
-              <a:t>Real releases are not one big component — they are one product component referencing several leaves. This is the shape day-2 (slide 12) operates on.</a:t>
+              <a:t>• Service components carry resources - images, charts, configs, SBOMs. Walk the LEFT box: `acme.org/sovereign/notes` and `acme.org/sovereign/postgres`, each with image + chart + `...` (real components carry more - configs, SBOMs - the `...` stands for that).</a:t>
+            </a:r>
+          </a:p>
+          <a:p>
+            <a:r>
+              <a:t>• A product component composes services via `componentReferences:` - name + version, no resources of its own. Walk the RIGHT box: `acme.org/sovereign/product` references both notes and postgres by name and version. Nothing else.</a:t>
+            </a:r>
+          </a:p>
+          <a:p>
+            <a:r>
+              <a:t>• Each service is independently versioned, signed, transferable. The product is a small descriptor that points at them.</a:t>
+            </a:r>
+          </a:p>
+          <a:p>
+            <a:r>
+              <a:t>Real releases are not one big component - they are one product component referencing several services. This is the shape day-2 (slide 12) operates on.</a:t>
             </a:r>
           </a:p>
         </p:txBody>
@@ -1836,27 +1937,32 @@
           <a:lstStyle/>
           <a:p>
             <a:r>
-              <a:t>Signature shape is separated from trust model. Descriptor signed one canonical way; how you prove the key is what varies. All three trust models are GA today:</a:t>
-            </a:r>
-          </a:p>
-          <a:p>
-            <a:r>
-              <a:t>• RSA / RSASSA-PSS — fits orgs with PKI, Vault, HSMs.</a:t>
-            </a:r>
-          </a:p>
-          <a:p>
-            <a:r>
-              <a:t>• GPG — fits OSS maintainers and orgs already running web-of-trust keyrings.</a:t>
-            </a:r>
-          </a:p>
-          <a:p>
-            <a:r>
-              <a:t>• Sigstore — keyless via OIDC + Rekor transparency log; fits CI like GitHub Actions with no long-lived keys.</a:t>
-            </a:r>
-          </a:p>
-          <a:p>
-            <a:r>
-              <a:t>Three things to land. Same signature shape covers the canonical descriptor. Verifiers can require multiple in parallel — RSA from release team and Sigstore from CI. Pick what your org already runs.</a:t>
+              <a:t>Signature shape is separated from trust model. Descriptor signed one canonical way; how you prove the key is what varies. All three are stable on the v1alpha1 API surface today:</a:t>
+            </a:r>
+          </a:p>
+          <a:p>
+            <a:r>
+              <a:t>• RSA / RSASSA-PSS - bare public-key pinning. The key you already rotate. No PKI required.</a:t>
+            </a:r>
+          </a:p>
+          <a:p>
+            <a:r>
+              <a:t>• GPG - fits OSS maintainers and orgs already running web-of-trust keyrings.</a:t>
+            </a:r>
+          </a:p>
+          <a:p>
+            <a:r>
+              <a:t>• Sigstore - keyless via OIDC + Rekor transparency log; fits CI like GitHub Actions with no long-lived keys.</a:t>
+            </a:r>
+          </a:p>
+          <a:p>
+            <a:r>
+              <a:t>Three things to land. Same signed object - the canonical descriptor digest - in all three. Verifiers can require multiple in parallel: RSA from the release team and Sigstore from CI. Pick what your org already runs.</a:t>
+            </a:r>
+          </a:p>
+          <a:p>
+            <a:r>
+              <a:t>On PEM-encoded RSA (X.509 certificate chains): not on this slide because it's still experimental - the CLI prints `experimental` warnings on sign and verify. Slide 14 names that.</a:t>
             </a:r>
           </a:p>
           <a:p>
@@ -6248,7 +6354,7 @@
           <a:lstStyle/>
           <a:p>
             <a:r>
-              <a:t>OCM controllers verify and apply. One mirrors.</a:t>
+              <a:t>OCM controllers verify and apply.</a:t>
             </a:r>
           </a:p>
         </p:txBody>
@@ -6657,67 +6763,13 @@
                 </a:solidFill>
                 <a:latin typeface="Aptos"/>
               </a:rPr>
-              <a:t>Applies it to the cluster.</a:t>
-            </a:r>
-          </a:p>
-        </p:txBody>
-      </p:sp>
-      <p:sp>
-        <p:nvSpPr>
-          <p:cNvPr id="11" name="Rounded Rectangle 10"/>
-          <p:cNvSpPr/>
-          <p:nvPr/>
-        </p:nvSpPr>
-        <p:spPr>
-          <a:xfrm>
-            <a:off x="7191375" y="8001000"/>
-            <a:ext cx="3905250" cy="2095500"/>
-          </a:xfrm>
-          <a:prstGeom prst="roundRect">
-            <a:avLst/>
-          </a:prstGeom>
-          <a:solidFill>
-            <a:srgbClr val="F3F4F6"/>
-          </a:solidFill>
-          <a:ln w="19050">
-            <a:solidFill>
-              <a:srgbClr val="0F6BFF"/>
-            </a:solidFill>
-          </a:ln>
-        </p:spPr>
-        <p:style>
-          <a:lnRef idx="1">
-            <a:schemeClr val="accent1"/>
-          </a:lnRef>
-          <a:fillRef idx="3">
-            <a:schemeClr val="accent1"/>
-          </a:fillRef>
-          <a:effectRef idx="2">
-            <a:schemeClr val="accent1"/>
-          </a:effectRef>
-          <a:fontRef idx="minor">
-            <a:schemeClr val="lt1"/>
-          </a:fontRef>
-        </p:style>
-        <p:txBody>
-          <a:bodyPr rtlCol="0" anchor="ctr" lIns="180000" rIns="180000" tIns="180000" bIns="180000" wrap="square"/>
-          <a:lstStyle/>
-          <a:p>
-            <a:pPr algn="ctr"/>
-            <a:r>
-              <a:rPr sz="2800" b="1">
-                <a:solidFill>
-                  <a:srgbClr val="0F6BFF"/>
-                </a:solidFill>
-                <a:latin typeface="Aptos"/>
-              </a:rPr>
-              <a:t>Replication</a:t>
+              <a:t>Applies it. Resolves image refs from</a:t>
             </a:r>
           </a:p>
           <a:p>
             <a:pPr algn="ctr">
               <a:spcBef>
-                <a:spcPts val="800"/>
+                <a:spcPts val="200"/>
               </a:spcBef>
             </a:pPr>
             <a:r>
@@ -6727,7 +6779,7 @@
                 </a:solidFill>
                 <a:latin typeface="Aptos"/>
               </a:rPr>
-              <a:t>Mirrors a version to another repository.</a:t>
+              <a:t>the verified descriptor.</a:t>
             </a:r>
           </a:p>
         </p:txBody>
@@ -6805,8 +6857,8 @@
         </p:nvSpPr>
         <p:spPr>
           <a:xfrm>
-            <a:off x="1428750" y="3619500"/>
-            <a:ext cx="6858000" cy="4953000"/>
+            <a:off x="1333500" y="3619500"/>
+            <a:ext cx="7048500" cy="5334000"/>
           </a:xfrm>
           <a:prstGeom prst="roundRect">
             <a:avLst/>
@@ -6850,7 +6902,7 @@
               </a:spcAft>
             </a:pPr>
             <a:r>
-              <a:rPr sz="2200">
+              <a:rPr sz="2000">
                 <a:solidFill>
                   <a:srgbClr val="0A3A99"/>
                 </a:solidFill>
@@ -6872,7 +6924,7 @@
               </a:spcAft>
             </a:pPr>
             <a:r>
-              <a:rPr sz="2200">
+              <a:rPr sz="2000">
                 <a:solidFill>
                   <a:srgbClr val="000000"/>
                 </a:solidFill>
@@ -6894,7 +6946,7 @@
               </a:spcAft>
             </a:pPr>
             <a:r>
-              <a:rPr sz="2200">
+              <a:rPr sz="2000">
                 <a:solidFill>
                   <a:srgbClr val="000000"/>
                 </a:solidFill>
@@ -6916,7 +6968,7 @@
               </a:spcAft>
             </a:pPr>
             <a:r>
-              <a:rPr sz="2200">
+              <a:rPr sz="2000">
                 <a:solidFill>
                   <a:srgbClr val="0A3A99"/>
                 </a:solidFill>
@@ -6938,7 +6990,7 @@
               </a:spcAft>
             </a:pPr>
             <a:r>
-              <a:rPr sz="2200">
+              <a:rPr sz="2000">
                 <a:solidFill>
                   <a:srgbClr val="000000"/>
                 </a:solidFill>
@@ -6960,13 +7012,13 @@
               </a:spcAft>
             </a:pPr>
             <a:r>
-              <a:rPr sz="2200">
+              <a:rPr sz="2000">
                 <a:solidFill>
                   <a:srgbClr val="000000"/>
                 </a:solidFill>
                 <a:latin typeface="Consolas"/>
               </a:rPr>
-              <a:t>      version: 1.0.0</a:t>
+              <a:t>      componentName: acme.org/sovereign/notes</a:t>
             </a:r>
           </a:p>
           <a:p>
@@ -6982,13 +7034,13 @@
               </a:spcAft>
             </a:pPr>
             <a:r>
-              <a:rPr sz="2200">
+              <a:rPr sz="2000">
                 <a:solidFill>
                   <a:srgbClr val="000000"/>
                 </a:solidFill>
                 <a:latin typeface="Consolas"/>
               </a:rPr>
-              <a:t>    - name: postgres</a:t>
+              <a:t>      version: 1.0.0</a:t>
             </a:r>
           </a:p>
           <a:p>
@@ -7004,13 +7056,13 @@
               </a:spcAft>
             </a:pPr>
             <a:r>
-              <a:rPr sz="2200">
+              <a:rPr sz="2000">
                 <a:solidFill>
                   <a:srgbClr val="000000"/>
                 </a:solidFill>
                 <a:latin typeface="Consolas"/>
               </a:rPr>
-              <a:t>      version: 1.0.0</a:t>
+              <a:t>    - name: postgres</a:t>
             </a:r>
           </a:p>
           <a:p>
@@ -7026,13 +7078,13 @@
               </a:spcAft>
             </a:pPr>
             <a:r>
-              <a:rPr sz="2200">
-                <a:solidFill>
-                  <a:srgbClr val="0A3A99"/>
+              <a:rPr sz="2000">
+                <a:solidFill>
+                  <a:srgbClr val="000000"/>
                 </a:solidFill>
                 <a:latin typeface="Consolas"/>
               </a:rPr>
-              <a:t>signatures:</a:t>
+              <a:t>      componentName: acme.org/sovereign/postgres</a:t>
             </a:r>
           </a:p>
           <a:p>
@@ -7048,13 +7100,13 @@
               </a:spcAft>
             </a:pPr>
             <a:r>
-              <a:rPr sz="2200">
+              <a:rPr sz="2000">
                 <a:solidFill>
                   <a:srgbClr val="000000"/>
                 </a:solidFill>
                 <a:latin typeface="Consolas"/>
               </a:rPr>
-              <a:t>  - name: acme-release-key</a:t>
+              <a:t>      version: 1.0.0</a:t>
             </a:r>
           </a:p>
           <a:p>
@@ -7070,13 +7122,101 @@
               </a:spcAft>
             </a:pPr>
             <a:r>
-              <a:rPr sz="2200">
+              <a:rPr sz="2000">
+                <a:solidFill>
+                  <a:srgbClr val="0A3A99"/>
+                </a:solidFill>
+                <a:latin typeface="Consolas"/>
+              </a:rPr>
+              <a:t>signatures:</a:t>
+            </a:r>
+          </a:p>
+          <a:p>
+            <a:pPr algn="l">
+              <a:lnSpc>
+                <a:spcPct val="115000"/>
+              </a:lnSpc>
+              <a:spcBef>
+                <a:spcPts val="0"/>
+              </a:spcBef>
+              <a:spcAft>
+                <a:spcPts val="0"/>
+              </a:spcAft>
+            </a:pPr>
+            <a:r>
+              <a:rPr sz="2000">
                 <a:solidFill>
                   <a:srgbClr val="000000"/>
                 </a:solidFill>
                 <a:latin typeface="Consolas"/>
               </a:rPr>
-              <a:t>    value: a4b1c2d3e5f6789abc012345def04691...</a:t>
+              <a:t>  - name: acme-release-key</a:t>
+            </a:r>
+          </a:p>
+          <a:p>
+            <a:pPr algn="l">
+              <a:lnSpc>
+                <a:spcPct val="115000"/>
+              </a:lnSpc>
+              <a:spcBef>
+                <a:spcPts val="0"/>
+              </a:spcBef>
+              <a:spcAft>
+                <a:spcPts val="0"/>
+              </a:spcAft>
+            </a:pPr>
+            <a:r>
+              <a:rPr sz="2000">
+                <a:solidFill>
+                  <a:srgbClr val="0A3A99"/>
+                </a:solidFill>
+                <a:latin typeface="Consolas"/>
+              </a:rPr>
+              <a:t>    signature:</a:t>
+            </a:r>
+          </a:p>
+          <a:p>
+            <a:pPr algn="l">
+              <a:lnSpc>
+                <a:spcPct val="115000"/>
+              </a:lnSpc>
+              <a:spcBef>
+                <a:spcPts val="0"/>
+              </a:spcBef>
+              <a:spcAft>
+                <a:spcPts val="0"/>
+              </a:spcAft>
+            </a:pPr>
+            <a:r>
+              <a:rPr sz="2000">
+                <a:solidFill>
+                  <a:srgbClr val="000000"/>
+                </a:solidFill>
+                <a:latin typeface="Consolas"/>
+              </a:rPr>
+              <a:t>      algorithm: RSASSA-PSS</a:t>
+            </a:r>
+          </a:p>
+          <a:p>
+            <a:pPr algn="l">
+              <a:lnSpc>
+                <a:spcPct val="115000"/>
+              </a:lnSpc>
+              <a:spcBef>
+                <a:spcPts val="0"/>
+              </a:spcBef>
+              <a:spcAft>
+                <a:spcPts val="0"/>
+              </a:spcAft>
+            </a:pPr>
+            <a:r>
+              <a:rPr sz="2000">
+                <a:solidFill>
+                  <a:srgbClr val="000000"/>
+                </a:solidFill>
+                <a:latin typeface="Consolas"/>
+              </a:rPr>
+              <a:t>      value: a4b1c2d3e5f6789abc012345def04691...</a:t>
             </a:r>
           </a:p>
         </p:txBody>
@@ -7089,8 +7229,8 @@
         </p:nvSpPr>
         <p:spPr>
           <a:xfrm>
-            <a:off x="10001250" y="3619500"/>
-            <a:ext cx="6858000" cy="4953000"/>
+            <a:off x="9906000" y="3619500"/>
+            <a:ext cx="7048500" cy="5334000"/>
           </a:xfrm>
           <a:prstGeom prst="roundRect">
             <a:avLst/>
@@ -7134,7 +7274,7 @@
               </a:spcAft>
             </a:pPr>
             <a:r>
-              <a:rPr sz="2200">
+              <a:rPr sz="2000">
                 <a:solidFill>
                   <a:srgbClr val="0A3A99"/>
                 </a:solidFill>
@@ -7156,7 +7296,7 @@
               </a:spcAft>
             </a:pPr>
             <a:r>
-              <a:rPr sz="2200">
+              <a:rPr sz="2000">
                 <a:solidFill>
                   <a:srgbClr val="000000"/>
                 </a:solidFill>
@@ -7178,7 +7318,7 @@
               </a:spcAft>
             </a:pPr>
             <a:r>
-              <a:rPr sz="2200">
+              <a:rPr sz="2000">
                 <a:solidFill>
                   <a:srgbClr val="0F6BFF"/>
                 </a:solidFill>
@@ -7200,7 +7340,7 @@
               </a:spcAft>
             </a:pPr>
             <a:r>
-              <a:rPr sz="2200">
+              <a:rPr sz="2000">
                 <a:solidFill>
                   <a:srgbClr val="0A3A99"/>
                 </a:solidFill>
@@ -7222,7 +7362,7 @@
               </a:spcAft>
             </a:pPr>
             <a:r>
-              <a:rPr sz="2200">
+              <a:rPr sz="2000">
                 <a:solidFill>
                   <a:srgbClr val="000000"/>
                 </a:solidFill>
@@ -7244,13 +7384,13 @@
               </a:spcAft>
             </a:pPr>
             <a:r>
-              <a:rPr sz="2200">
-                <a:solidFill>
-                  <a:srgbClr val="0F6BFF"/>
+              <a:rPr sz="2000">
+                <a:solidFill>
+                  <a:srgbClr val="000000"/>
                 </a:solidFill>
                 <a:latin typeface="Consolas"/>
               </a:rPr>
-              <a:t>      version: 1.1.0</a:t>
+              <a:t>      componentName: acme.org/sovereign/notes</a:t>
             </a:r>
           </a:p>
           <a:p>
@@ -7266,13 +7406,13 @@
               </a:spcAft>
             </a:pPr>
             <a:r>
-              <a:rPr sz="2200">
-                <a:solidFill>
-                  <a:srgbClr val="000000"/>
+              <a:rPr sz="2000">
+                <a:solidFill>
+                  <a:srgbClr val="0F6BFF"/>
                 </a:solidFill>
                 <a:latin typeface="Consolas"/>
               </a:rPr>
-              <a:t>    - name: postgres</a:t>
+              <a:t>      version: 1.1.0</a:t>
             </a:r>
           </a:p>
           <a:p>
@@ -7288,13 +7428,13 @@
               </a:spcAft>
             </a:pPr>
             <a:r>
-              <a:rPr sz="2200">
+              <a:rPr sz="2000">
                 <a:solidFill>
                   <a:srgbClr val="000000"/>
                 </a:solidFill>
                 <a:latin typeface="Consolas"/>
               </a:rPr>
-              <a:t>      version: 1.0.0</a:t>
+              <a:t>    - name: postgres</a:t>
             </a:r>
           </a:p>
           <a:p>
@@ -7310,13 +7450,13 @@
               </a:spcAft>
             </a:pPr>
             <a:r>
-              <a:rPr sz="2200">
-                <a:solidFill>
-                  <a:srgbClr val="0A3A99"/>
+              <a:rPr sz="2000">
+                <a:solidFill>
+                  <a:srgbClr val="000000"/>
                 </a:solidFill>
                 <a:latin typeface="Consolas"/>
               </a:rPr>
-              <a:t>signatures:</a:t>
+              <a:t>      componentName: acme.org/sovereign/postgres</a:t>
             </a:r>
           </a:p>
           <a:p>
@@ -7332,13 +7472,13 @@
               </a:spcAft>
             </a:pPr>
             <a:r>
-              <a:rPr sz="2200">
+              <a:rPr sz="2000">
                 <a:solidFill>
                   <a:srgbClr val="000000"/>
                 </a:solidFill>
                 <a:latin typeface="Consolas"/>
               </a:rPr>
-              <a:t>  - name: acme-release-key</a:t>
+              <a:t>      version: 1.0.0</a:t>
             </a:r>
           </a:p>
           <a:p>
@@ -7354,13 +7494,101 @@
               </a:spcAft>
             </a:pPr>
             <a:r>
-              <a:rPr sz="2200">
+              <a:rPr sz="2000">
+                <a:solidFill>
+                  <a:srgbClr val="0A3A99"/>
+                </a:solidFill>
+                <a:latin typeface="Consolas"/>
+              </a:rPr>
+              <a:t>signatures:</a:t>
+            </a:r>
+          </a:p>
+          <a:p>
+            <a:pPr algn="l">
+              <a:lnSpc>
+                <a:spcPct val="115000"/>
+              </a:lnSpc>
+              <a:spcBef>
+                <a:spcPts val="0"/>
+              </a:spcBef>
+              <a:spcAft>
+                <a:spcPts val="0"/>
+              </a:spcAft>
+            </a:pPr>
+            <a:r>
+              <a:rPr sz="2000">
+                <a:solidFill>
+                  <a:srgbClr val="000000"/>
+                </a:solidFill>
+                <a:latin typeface="Consolas"/>
+              </a:rPr>
+              <a:t>  - name: acme-release-key</a:t>
+            </a:r>
+          </a:p>
+          <a:p>
+            <a:pPr algn="l">
+              <a:lnSpc>
+                <a:spcPct val="115000"/>
+              </a:lnSpc>
+              <a:spcBef>
+                <a:spcPts val="0"/>
+              </a:spcBef>
+              <a:spcAft>
+                <a:spcPts val="0"/>
+              </a:spcAft>
+            </a:pPr>
+            <a:r>
+              <a:rPr sz="2000">
+                <a:solidFill>
+                  <a:srgbClr val="0A3A99"/>
+                </a:solidFill>
+                <a:latin typeface="Consolas"/>
+              </a:rPr>
+              <a:t>    signature:</a:t>
+            </a:r>
+          </a:p>
+          <a:p>
+            <a:pPr algn="l">
+              <a:lnSpc>
+                <a:spcPct val="115000"/>
+              </a:lnSpc>
+              <a:spcBef>
+                <a:spcPts val="0"/>
+              </a:spcBef>
+              <a:spcAft>
+                <a:spcPts val="0"/>
+              </a:spcAft>
+            </a:pPr>
+            <a:r>
+              <a:rPr sz="2000">
+                <a:solidFill>
+                  <a:srgbClr val="000000"/>
+                </a:solidFill>
+                <a:latin typeface="Consolas"/>
+              </a:rPr>
+              <a:t>      algorithm: RSASSA-PSS</a:t>
+            </a:r>
+          </a:p>
+          <a:p>
+            <a:pPr algn="l">
+              <a:lnSpc>
+                <a:spcPct val="115000"/>
+              </a:lnSpc>
+              <a:spcBef>
+                <a:spcPts val="0"/>
+              </a:spcBef>
+              <a:spcAft>
+                <a:spcPts val="0"/>
+              </a:spcAft>
+            </a:pPr>
+            <a:r>
+              <a:rPr sz="2000">
                 <a:solidFill>
                   <a:srgbClr val="0F6BFF"/>
                 </a:solidFill>
                 <a:latin typeface="Consolas"/>
               </a:rPr>
-              <a:t>    value: 9c2af18b3e7d52914a8c6b0f1d2e8f37...</a:t>
+              <a:t>      value: 9c2af18b3e7d52914a8c6b0f1d2e8f37...</a:t>
             </a:r>
           </a:p>
         </p:txBody>
@@ -7373,7 +7601,7 @@
         </p:nvSpPr>
         <p:spPr>
           <a:xfrm>
-            <a:off x="8572500" y="5619750"/>
+            <a:off x="8572500" y="5810250"/>
             <a:ext cx="1143000" cy="952500"/>
           </a:xfrm>
           <a:prstGeom prst="rightArrow">
@@ -7416,7 +7644,7 @@
         </p:nvSpPr>
         <p:spPr>
           <a:xfrm>
-            <a:off x="8286750" y="5048250"/>
+            <a:off x="8286750" y="5238750"/>
             <a:ext cx="1714500" cy="476250"/>
           </a:xfrm>
           <a:prstGeom prst="rect">
@@ -7451,7 +7679,7 @@
         </p:nvSpPr>
         <p:spPr>
           <a:xfrm>
-            <a:off x="1143000" y="9144000"/>
+            <a:off x="1143000" y="9239250"/>
             <a:ext cx="16002000" cy="571500"/>
           </a:xfrm>
           <a:prstGeom prst="rect">
@@ -7831,7 +8059,7 @@
                 </a:solidFill>
                 <a:latin typeface="Aptos"/>
               </a:rPr>
-              <a:t>Apply a Component resource — verified and reconciling.</a:t>
+              <a:t>Deploy a component.</a:t>
             </a:r>
           </a:p>
           <a:p>
@@ -7907,7 +8135,7 @@
           <a:lstStyle/>
           <a:p>
             <a:r>
-              <a:t>Two honest edges.</a:t>
+              <a:t>Three honest edges.</a:t>
             </a:r>
           </a:p>
         </p:txBody>
@@ -7936,7 +8164,7 @@
               </a:spcAft>
             </a:pPr>
             <a:r>
-              <a:rPr b="1" sz="2800">
+              <a:rPr b="1" sz="2600">
                 <a:solidFill>
                   <a:srgbClr val="0F6BFF"/>
                 </a:solidFill>
@@ -7944,7 +8172,7 @@
               <a:t>▪  </a:t>
             </a:r>
             <a:r>
-              <a:rPr b="1" sz="2800">
+              <a:rPr b="1" sz="2600">
                 <a:solidFill>
                   <a:srgbClr val="0F6BFF"/>
                 </a:solidFill>
@@ -7952,7 +8180,7 @@
               <a:t>Transfer defaults</a:t>
             </a:r>
             <a:r>
-              <a:rPr sz="2800">
+              <a:rPr sz="2600">
                 <a:solidFill>
                   <a:srgbClr val="000000"/>
                 </a:solidFill>
@@ -7970,7 +8198,7 @@
               </a:spcAft>
             </a:pPr>
             <a:r>
-              <a:rPr b="1" sz="2800">
+              <a:rPr b="1" sz="2600">
                 <a:solidFill>
                   <a:srgbClr val="0F6BFF"/>
                 </a:solidFill>
@@ -7978,7 +8206,7 @@
               <a:t>▪  </a:t>
             </a:r>
             <a:r>
-              <a:rPr b="1" sz="2800">
+              <a:rPr b="1" sz="2600">
                 <a:solidFill>
                   <a:srgbClr val="0F6BFF"/>
                 </a:solidFill>
@@ -7986,12 +8214,46 @@
               <a:t>Controllers are v1alpha1</a:t>
             </a:r>
             <a:r>
-              <a:rPr sz="2800">
+              <a:rPr sz="2600">
                 <a:solidFill>
                   <a:srgbClr val="000000"/>
                 </a:solidFill>
               </a:rPr>
               <a:t> — the CRD surface can move. Pin minor versions in your platform installs.</a:t>
+            </a:r>
+          </a:p>
+          <a:p>
+            <a:pPr>
+              <a:spcBef>
+                <a:spcPts val="800"/>
+              </a:spcBef>
+              <a:spcAft>
+                <a:spcPts val="800"/>
+              </a:spcAft>
+            </a:pPr>
+            <a:r>
+              <a:rPr b="1" sz="2600">
+                <a:solidFill>
+                  <a:srgbClr val="0F6BFF"/>
+                </a:solidFill>
+              </a:rPr>
+              <a:t>▪  </a:t>
+            </a:r>
+            <a:r>
+              <a:rPr b="1" sz="2600">
+                <a:solidFill>
+                  <a:srgbClr val="0F6BFF"/>
+                </a:solidFill>
+              </a:rPr>
+              <a:t>PEM-encoded RSA (cert chains) is experimental</a:t>
+            </a:r>
+            <a:r>
+              <a:rPr sz="2600">
+                <a:solidFill>
+                  <a:srgbClr val="000000"/>
+                </a:solidFill>
+              </a:rPr>
+              <a:t> — the CLI prints `experimental` warnings on sign/verify. Plain RSA, GPG, and Sigstore are stable on the same v1alpha1 surface; PEM may still shift.</a:t>
             </a:r>
           </a:p>
         </p:txBody>
@@ -8061,7 +8323,7 @@
                   <a:srgbClr val="5CD6FF"/>
                 </a:solidFill>
               </a:rPr>
-              <a:t>Try it</a:t>
+              <a:t>Evaluate</a:t>
             </a:r>
             <a:r>
               <a:rPr>
@@ -8069,7 +8331,7 @@
                   <a:srgbClr val="FFFFFF"/>
                 </a:solidFill>
               </a:rPr>
-              <a:t> — ocm.software</a:t>
+              <a:t> — ocm.software · run conformance/scenarios/sovereign</a:t>
             </a:r>
           </a:p>
           <a:p>
@@ -8079,7 +8341,7 @@
                   <a:srgbClr val="5CD6FF"/>
                 </a:solidFill>
               </a:rPr>
-              <a:t>Build with us</a:t>
+              <a:t>Pilot</a:t>
             </a:r>
             <a:r>
               <a:rPr>
@@ -8087,7 +8349,7 @@
                   <a:srgbClr val="FFFFFF"/>
                 </a:solidFill>
               </a:rPr>
-              <a:t> — github.com/open-component-model</a:t>
+              <a:t> — github.com/open-component-model · one product, one team</a:t>
             </a:r>
           </a:p>
           <a:p>
@@ -8097,7 +8359,7 @@
                   <a:srgbClr val="5CD6FF"/>
                 </a:solidFill>
               </a:rPr>
-              <a:t>Talk to us</a:t>
+              <a:t>Engage</a:t>
             </a:r>
             <a:r>
               <a:rPr>
@@ -8105,7 +8367,7 @@
                   <a:srgbClr val="FFFFFF"/>
                 </a:solidFill>
               </a:rPr>
-              <a:t> — community channels on the website</a:t>
+              <a:t> — community channels on the website · NeoNephos Foundation</a:t>
             </a:r>
           </a:p>
         </p:txBody>
@@ -8158,6 +8420,596 @@
           </a:prstGeom>
         </p:spPr>
       </p:pic>
+    </p:spTree>
+  </p:cSld>
+  <p:clrMapOvr>
+    <a:masterClrMapping/>
+  </p:clrMapOvr>
+</p:sld>
+</file>
+
+<file path=ppt/slides/slide16.xml><?xml version="1.0" encoding="utf-8"?>
+<p:sld xmlns:a="http://schemas.openxmlformats.org/drawingml/2006/main" xmlns:p="http://schemas.openxmlformats.org/presentationml/2006/main" xmlns:r="http://schemas.openxmlformats.org/officeDocument/2006/relationships">
+  <p:cSld>
+    <p:spTree>
+      <p:nvGrpSpPr>
+        <p:cNvPr id="1" name=""/>
+        <p:cNvGrpSpPr/>
+        <p:nvPr/>
+      </p:nvGrpSpPr>
+      <p:grpSpPr/>
+      <p:sp>
+        <p:nvSpPr>
+          <p:cNvPr id="2" name="Text Placeholder 1"/>
+          <p:cNvSpPr>
+            <a:spLocks noGrp="1"/>
+          </p:cNvSpPr>
+          <p:nvPr>
+            <p:ph type="body" idx="1"/>
+          </p:nvPr>
+        </p:nvSpPr>
+        <p:spPr/>
+        <p:txBody>
+          <a:bodyPr/>
+          <a:lstStyle/>
+          <a:p>
+            <a:r>
+              <a:t>APPENDIX · REPLICATION</a:t>
+            </a:r>
+          </a:p>
+        </p:txBody>
+      </p:sp>
+      <p:sp>
+        <p:nvSpPr>
+          <p:cNvPr id="3" name="Title 2"/>
+          <p:cNvSpPr>
+            <a:spLocks noGrp="1"/>
+          </p:cNvSpPr>
+          <p:nvPr>
+            <p:ph type="title" idx="2"/>
+          </p:nvPr>
+        </p:nvSpPr>
+        <p:spPr/>
+        <p:txBody>
+          <a:bodyPr/>
+          <a:lstStyle/>
+          <a:p>
+            <a:r>
+              <a:t>Alongside the chain. Not within it.</a:t>
+            </a:r>
+          </a:p>
+        </p:txBody>
+      </p:sp>
+      <p:sp>
+        <p:nvSpPr>
+          <p:cNvPr id="4" name="Rounded Rectangle 3"/>
+          <p:cNvSpPr/>
+          <p:nvPr/>
+        </p:nvSpPr>
+        <p:spPr>
+          <a:xfrm>
+            <a:off x="619125" y="5143500"/>
+            <a:ext cx="3905250" cy="2095500"/>
+          </a:xfrm>
+          <a:prstGeom prst="roundRect">
+            <a:avLst/>
+          </a:prstGeom>
+          <a:solidFill>
+            <a:srgbClr val="F3F4F6"/>
+          </a:solidFill>
+          <a:ln w="12700">
+            <a:solidFill>
+              <a:srgbClr val="6B7280"/>
+            </a:solidFill>
+          </a:ln>
+        </p:spPr>
+        <p:style>
+          <a:lnRef idx="1">
+            <a:schemeClr val="accent1"/>
+          </a:lnRef>
+          <a:fillRef idx="3">
+            <a:schemeClr val="accent1"/>
+          </a:fillRef>
+          <a:effectRef idx="2">
+            <a:schemeClr val="accent1"/>
+          </a:effectRef>
+          <a:fontRef idx="minor">
+            <a:schemeClr val="lt1"/>
+          </a:fontRef>
+        </p:style>
+        <p:txBody>
+          <a:bodyPr rtlCol="0" anchor="ctr" lIns="180000" rIns="180000" tIns="180000" bIns="180000" wrap="square"/>
+          <a:lstStyle/>
+          <a:p>
+            <a:pPr algn="ctr"/>
+            <a:r>
+              <a:rPr sz="2400" b="1">
+                <a:solidFill>
+                  <a:srgbClr val="6B7280"/>
+                </a:solidFill>
+                <a:latin typeface="Aptos"/>
+              </a:rPr>
+              <a:t>Repository</a:t>
+            </a:r>
+          </a:p>
+          <a:p>
+            <a:pPr algn="ctr">
+              <a:spcBef>
+                <a:spcPts val="800"/>
+              </a:spcBef>
+            </a:pPr>
+            <a:r>
+              <a:rPr sz="1800">
+                <a:solidFill>
+                  <a:srgbClr val="6B7280"/>
+                </a:solidFill>
+                <a:latin typeface="Aptos"/>
+              </a:rPr>
+              <a:t>Where versions live.</a:t>
+            </a:r>
+          </a:p>
+        </p:txBody>
+      </p:sp>
+      <p:sp>
+        <p:nvSpPr>
+          <p:cNvPr id="5" name="Right Arrow 4"/>
+          <p:cNvSpPr/>
+          <p:nvPr/>
+        </p:nvSpPr>
+        <p:spPr>
+          <a:xfrm>
+            <a:off x="4581525" y="6115050"/>
+            <a:ext cx="361950" cy="171450"/>
+          </a:xfrm>
+          <a:prstGeom prst="rightArrow">
+            <a:avLst/>
+          </a:prstGeom>
+          <a:solidFill>
+            <a:srgbClr val="6B7280"/>
+          </a:solidFill>
+          <a:ln>
+            <a:noFill/>
+          </a:ln>
+        </p:spPr>
+        <p:style>
+          <a:lnRef idx="1">
+            <a:schemeClr val="accent1"/>
+          </a:lnRef>
+          <a:fillRef idx="3">
+            <a:schemeClr val="accent1"/>
+          </a:fillRef>
+          <a:effectRef idx="2">
+            <a:schemeClr val="accent1"/>
+          </a:effectRef>
+          <a:fontRef idx="minor">
+            <a:schemeClr val="lt1"/>
+          </a:fontRef>
+        </p:style>
+        <p:txBody>
+          <a:bodyPr rtlCol="0" anchor="ctr"/>
+          <a:lstStyle/>
+          <a:p>
+            <a:pPr algn="ctr"/>
+          </a:p>
+        </p:txBody>
+      </p:sp>
+      <p:sp>
+        <p:nvSpPr>
+          <p:cNvPr id="6" name="Rounded Rectangle 5"/>
+          <p:cNvSpPr/>
+          <p:nvPr/>
+        </p:nvSpPr>
+        <p:spPr>
+          <a:xfrm>
+            <a:off x="5000625" y="5143500"/>
+            <a:ext cx="3905250" cy="2095500"/>
+          </a:xfrm>
+          <a:prstGeom prst="roundRect">
+            <a:avLst/>
+          </a:prstGeom>
+          <a:solidFill>
+            <a:srgbClr val="F3F4F6"/>
+          </a:solidFill>
+          <a:ln w="12700">
+            <a:solidFill>
+              <a:srgbClr val="6B7280"/>
+            </a:solidFill>
+          </a:ln>
+        </p:spPr>
+        <p:style>
+          <a:lnRef idx="1">
+            <a:schemeClr val="accent1"/>
+          </a:lnRef>
+          <a:fillRef idx="3">
+            <a:schemeClr val="accent1"/>
+          </a:fillRef>
+          <a:effectRef idx="2">
+            <a:schemeClr val="accent1"/>
+          </a:effectRef>
+          <a:fontRef idx="minor">
+            <a:schemeClr val="lt1"/>
+          </a:fontRef>
+        </p:style>
+        <p:txBody>
+          <a:bodyPr rtlCol="0" anchor="ctr" lIns="180000" rIns="180000" tIns="180000" bIns="180000" wrap="square"/>
+          <a:lstStyle/>
+          <a:p>
+            <a:pPr algn="ctr"/>
+            <a:r>
+              <a:rPr sz="2400" b="1">
+                <a:solidFill>
+                  <a:srgbClr val="6B7280"/>
+                </a:solidFill>
+                <a:latin typeface="Aptos"/>
+              </a:rPr>
+              <a:t>Component</a:t>
+            </a:r>
+          </a:p>
+          <a:p>
+            <a:pPr algn="ctr">
+              <a:spcBef>
+                <a:spcPts val="800"/>
+              </a:spcBef>
+            </a:pPr>
+            <a:r>
+              <a:rPr sz="1800">
+                <a:solidFill>
+                  <a:srgbClr val="6B7280"/>
+                </a:solidFill>
+                <a:latin typeface="Aptos"/>
+              </a:rPr>
+              <a:t>Pulls + verifies.</a:t>
+            </a:r>
+          </a:p>
+        </p:txBody>
+      </p:sp>
+      <p:sp>
+        <p:nvSpPr>
+          <p:cNvPr id="7" name="Right Arrow 6"/>
+          <p:cNvSpPr/>
+          <p:nvPr/>
+        </p:nvSpPr>
+        <p:spPr>
+          <a:xfrm>
+            <a:off x="8963025" y="6115050"/>
+            <a:ext cx="361950" cy="171450"/>
+          </a:xfrm>
+          <a:prstGeom prst="rightArrow">
+            <a:avLst/>
+          </a:prstGeom>
+          <a:solidFill>
+            <a:srgbClr val="6B7280"/>
+          </a:solidFill>
+          <a:ln>
+            <a:noFill/>
+          </a:ln>
+        </p:spPr>
+        <p:style>
+          <a:lnRef idx="1">
+            <a:schemeClr val="accent1"/>
+          </a:lnRef>
+          <a:fillRef idx="3">
+            <a:schemeClr val="accent1"/>
+          </a:fillRef>
+          <a:effectRef idx="2">
+            <a:schemeClr val="accent1"/>
+          </a:effectRef>
+          <a:fontRef idx="minor">
+            <a:schemeClr val="lt1"/>
+          </a:fontRef>
+        </p:style>
+        <p:txBody>
+          <a:bodyPr rtlCol="0" anchor="ctr"/>
+          <a:lstStyle/>
+          <a:p>
+            <a:pPr algn="ctr"/>
+          </a:p>
+        </p:txBody>
+      </p:sp>
+      <p:sp>
+        <p:nvSpPr>
+          <p:cNvPr id="8" name="Rounded Rectangle 7"/>
+          <p:cNvSpPr/>
+          <p:nvPr/>
+        </p:nvSpPr>
+        <p:spPr>
+          <a:xfrm>
+            <a:off x="9382125" y="5143500"/>
+            <a:ext cx="3905250" cy="2095500"/>
+          </a:xfrm>
+          <a:prstGeom prst="roundRect">
+            <a:avLst/>
+          </a:prstGeom>
+          <a:solidFill>
+            <a:srgbClr val="F3F4F6"/>
+          </a:solidFill>
+          <a:ln w="12700">
+            <a:solidFill>
+              <a:srgbClr val="6B7280"/>
+            </a:solidFill>
+          </a:ln>
+        </p:spPr>
+        <p:style>
+          <a:lnRef idx="1">
+            <a:schemeClr val="accent1"/>
+          </a:lnRef>
+          <a:fillRef idx="3">
+            <a:schemeClr val="accent1"/>
+          </a:fillRef>
+          <a:effectRef idx="2">
+            <a:schemeClr val="accent1"/>
+          </a:effectRef>
+          <a:fontRef idx="minor">
+            <a:schemeClr val="lt1"/>
+          </a:fontRef>
+        </p:style>
+        <p:txBody>
+          <a:bodyPr rtlCol="0" anchor="ctr" lIns="180000" rIns="180000" tIns="180000" bIns="180000" wrap="square"/>
+          <a:lstStyle/>
+          <a:p>
+            <a:pPr algn="ctr"/>
+            <a:r>
+              <a:rPr sz="2400" b="1">
+                <a:solidFill>
+                  <a:srgbClr val="6B7280"/>
+                </a:solidFill>
+                <a:latin typeface="Aptos"/>
+              </a:rPr>
+              <a:t>Resource</a:t>
+            </a:r>
+          </a:p>
+          <a:p>
+            <a:pPr algn="ctr">
+              <a:spcBef>
+                <a:spcPts val="800"/>
+              </a:spcBef>
+            </a:pPr>
+            <a:r>
+              <a:rPr sz="1800">
+                <a:solidFill>
+                  <a:srgbClr val="6B7280"/>
+                </a:solidFill>
+                <a:latin typeface="Aptos"/>
+              </a:rPr>
+              <a:t>One artifact, by digest.</a:t>
+            </a:r>
+          </a:p>
+        </p:txBody>
+      </p:sp>
+      <p:sp>
+        <p:nvSpPr>
+          <p:cNvPr id="9" name="Right Arrow 8"/>
+          <p:cNvSpPr/>
+          <p:nvPr/>
+        </p:nvSpPr>
+        <p:spPr>
+          <a:xfrm>
+            <a:off x="13344525" y="6115050"/>
+            <a:ext cx="361950" cy="171450"/>
+          </a:xfrm>
+          <a:prstGeom prst="rightArrow">
+            <a:avLst/>
+          </a:prstGeom>
+          <a:solidFill>
+            <a:srgbClr val="6B7280"/>
+          </a:solidFill>
+          <a:ln>
+            <a:noFill/>
+          </a:ln>
+        </p:spPr>
+        <p:style>
+          <a:lnRef idx="1">
+            <a:schemeClr val="accent1"/>
+          </a:lnRef>
+          <a:fillRef idx="3">
+            <a:schemeClr val="accent1"/>
+          </a:fillRef>
+          <a:effectRef idx="2">
+            <a:schemeClr val="accent1"/>
+          </a:effectRef>
+          <a:fontRef idx="minor">
+            <a:schemeClr val="lt1"/>
+          </a:fontRef>
+        </p:style>
+        <p:txBody>
+          <a:bodyPr rtlCol="0" anchor="ctr"/>
+          <a:lstStyle/>
+          <a:p>
+            <a:pPr algn="ctr"/>
+          </a:p>
+        </p:txBody>
+      </p:sp>
+      <p:sp>
+        <p:nvSpPr>
+          <p:cNvPr id="10" name="Rounded Rectangle 9"/>
+          <p:cNvSpPr/>
+          <p:nvPr/>
+        </p:nvSpPr>
+        <p:spPr>
+          <a:xfrm>
+            <a:off x="13763625" y="5143500"/>
+            <a:ext cx="3905250" cy="2095500"/>
+          </a:xfrm>
+          <a:prstGeom prst="roundRect">
+            <a:avLst/>
+          </a:prstGeom>
+          <a:solidFill>
+            <a:srgbClr val="F3F4F6"/>
+          </a:solidFill>
+          <a:ln w="12700">
+            <a:solidFill>
+              <a:srgbClr val="6B7280"/>
+            </a:solidFill>
+          </a:ln>
+        </p:spPr>
+        <p:style>
+          <a:lnRef idx="1">
+            <a:schemeClr val="accent1"/>
+          </a:lnRef>
+          <a:fillRef idx="3">
+            <a:schemeClr val="accent1"/>
+          </a:fillRef>
+          <a:effectRef idx="2">
+            <a:schemeClr val="accent1"/>
+          </a:effectRef>
+          <a:fontRef idx="minor">
+            <a:schemeClr val="lt1"/>
+          </a:fontRef>
+        </p:style>
+        <p:txBody>
+          <a:bodyPr rtlCol="0" anchor="ctr" lIns="180000" rIns="180000" tIns="180000" bIns="180000" wrap="square"/>
+          <a:lstStyle/>
+          <a:p>
+            <a:pPr algn="ctr"/>
+            <a:r>
+              <a:rPr sz="2400" b="1">
+                <a:solidFill>
+                  <a:srgbClr val="6B7280"/>
+                </a:solidFill>
+                <a:latin typeface="Aptos"/>
+              </a:rPr>
+              <a:t>Deployer</a:t>
+            </a:r>
+          </a:p>
+          <a:p>
+            <a:pPr algn="ctr">
+              <a:spcBef>
+                <a:spcPts val="800"/>
+              </a:spcBef>
+            </a:pPr>
+            <a:r>
+              <a:rPr sz="1800">
+                <a:solidFill>
+                  <a:srgbClr val="6B7280"/>
+                </a:solidFill>
+                <a:latin typeface="Aptos"/>
+              </a:rPr>
+              <a:t>Applies. Resolves refs.</a:t>
+            </a:r>
+          </a:p>
+        </p:txBody>
+      </p:sp>
+      <p:sp>
+        <p:nvSpPr>
+          <p:cNvPr id="11" name="Rounded Rectangle 10"/>
+          <p:cNvSpPr/>
+          <p:nvPr/>
+        </p:nvSpPr>
+        <p:spPr>
+          <a:xfrm>
+            <a:off x="5810250" y="7620000"/>
+            <a:ext cx="6667500" cy="2476500"/>
+          </a:xfrm>
+          <a:prstGeom prst="roundRect">
+            <a:avLst/>
+          </a:prstGeom>
+          <a:solidFill>
+            <a:srgbClr val="F3F4F6"/>
+          </a:solidFill>
+          <a:ln w="25400">
+            <a:solidFill>
+              <a:srgbClr val="0F6BFF"/>
+            </a:solidFill>
+          </a:ln>
+        </p:spPr>
+        <p:style>
+          <a:lnRef idx="1">
+            <a:schemeClr val="accent1"/>
+          </a:lnRef>
+          <a:fillRef idx="3">
+            <a:schemeClr val="accent1"/>
+          </a:fillRef>
+          <a:effectRef idx="2">
+            <a:schemeClr val="accent1"/>
+          </a:effectRef>
+          <a:fontRef idx="minor">
+            <a:schemeClr val="lt1"/>
+          </a:fontRef>
+        </p:style>
+        <p:txBody>
+          <a:bodyPr rtlCol="0" anchor="ctr" lIns="220000" rIns="220000" tIns="180000" bIns="180000" wrap="square"/>
+          <a:lstStyle/>
+          <a:p>
+            <a:pPr algn="ctr"/>
+            <a:r>
+              <a:rPr sz="3000" b="1">
+                <a:solidFill>
+                  <a:srgbClr val="0F6BFF"/>
+                </a:solidFill>
+                <a:latin typeface="Aptos"/>
+              </a:rPr>
+              <a:t>Replication</a:t>
+            </a:r>
+          </a:p>
+          <a:p>
+            <a:pPr algn="ctr">
+              <a:spcBef>
+                <a:spcPts val="1000"/>
+              </a:spcBef>
+            </a:pPr>
+            <a:r>
+              <a:rPr sz="2000">
+                <a:solidFill>
+                  <a:srgbClr val="000000"/>
+                </a:solidFill>
+                <a:latin typeface="Aptos"/>
+              </a:rPr>
+              <a:t>Transfers a resolved component version from one OCM repository to another.</a:t>
+            </a:r>
+          </a:p>
+          <a:p>
+            <a:pPr algn="ctr">
+              <a:spcBef>
+                <a:spcPts val="600"/>
+              </a:spcBef>
+            </a:pPr>
+            <a:r>
+              <a:rPr sz="2000">
+                <a:solidFill>
+                  <a:srgbClr val="000000"/>
+                </a:solidFill>
+                <a:latin typeface="Aptos"/>
+              </a:rPr>
+              <a:t>Records status.lastTransferredDigest. Same digest → no-op.</a:t>
+            </a:r>
+          </a:p>
+        </p:txBody>
+      </p:sp>
+      <p:sp>
+        <p:nvSpPr>
+          <p:cNvPr id="12" name="TextBox 11"/>
+          <p:cNvSpPr txBox="1"/>
+          <p:nvPr/>
+        </p:nvSpPr>
+        <p:spPr>
+          <a:xfrm>
+            <a:off x="1143000" y="10382250"/>
+            <a:ext cx="16002000" cy="476250"/>
+          </a:xfrm>
+          <a:prstGeom prst="rect">
+            <a:avLst/>
+          </a:prstGeom>
+          <a:noFill/>
+        </p:spPr>
+        <p:txBody>
+          <a:bodyPr wrap="square" lIns="0" rIns="0" tIns="0" bIns="0">
+            <a:spAutoFit/>
+          </a:bodyPr>
+          <a:lstStyle/>
+          <a:p>
+            <a:pPr algn="ctr"/>
+            <a:r>
+              <a:rPr sz="2000">
+                <a:solidFill>
+                  <a:srgbClr val="0A3A99"/>
+                </a:solidFill>
+                <a:latin typeface="Aptos"/>
+              </a:rPr>
+              <a:t>Controller-shaped equivalent of `ocm transfer cv` — mirroring, promotion, in-cluster air-gap.</a:t>
+            </a:r>
+          </a:p>
+        </p:txBody>
+      </p:sp>
     </p:spTree>
   </p:cSld>
   <p:clrMapOvr>
@@ -8445,7 +9297,7 @@
                 </a:solidFill>
                 <a:latin typeface="Aptos"/>
               </a:rPr>
-              <a:t>Coordinates</a:t>
+              <a:t>Component identity</a:t>
             </a:r>
             <a:r>
               <a:rPr sz="2800">
@@ -9062,12 +9914,12 @@
           <a:lstStyle/>
           <a:p>
             <a:r>
-              <a:t>Helm, OCI, SBOM, npm, binaries.</a:t>
-            </a:r>
-          </a:p>
-          <a:p>
-            <a:r>
-              <a:t>Each becomes a resource inside the component.</a:t>
+              <a:t>OCI, Helm, configs, SBOMs, binaries.</a:t>
+            </a:r>
+          </a:p>
+          <a:p>
+            <a:r>
+              <a:t>Artifact type is free-form; access types are pluggable.</a:t>
             </a:r>
           </a:p>
         </p:txBody>
@@ -9109,7 +9961,7 @@
           <a:lstStyle/>
           <a:p>
             <a:r>
-              <a:t>Coordinates travel.</a:t>
+              <a:t>Component identity travels.</a:t>
             </a:r>
           </a:p>
           <a:p>
@@ -10710,7 +11562,7 @@
           <a:lstStyle/>
           <a:p>
             <a:r>
-              <a:t>FOUR VERBS, ONE COMPONENT</a:t>
+              <a:t>THE FOUR MOVES</a:t>
             </a:r>
           </a:p>
         </p:txBody>
@@ -10815,7 +11667,7 @@
           <a:lstStyle/>
           <a:p>
             <a:r>
-              <a:t>Leaf carries resources. Product carries references.</a:t>
+              <a:t>Service carries resources. Product carries references.</a:t>
             </a:r>
           </a:p>
         </p:txBody>
@@ -10854,7 +11706,7 @@
                 </a:solidFill>
                 <a:latin typeface="Aptos"/>
               </a:rPr>
-              <a:t>Leaf components </a:t>
+              <a:t>Service components </a:t>
             </a:r>
             <a:r>
               <a:rPr sz="2200">
@@ -10873,7 +11725,7 @@
                 </a:solidFill>
                 <a:latin typeface="Aptos"/>
               </a:rPr>
-              <a:t>A product or release component </a:t>
+              <a:t>A product component </a:t>
             </a:r>
             <a:r>
               <a:rPr sz="2200">
@@ -10900,7 +11752,7 @@
                 </a:solidFill>
                 <a:latin typeface="Aptos"/>
               </a:rPr>
-              <a:t>. One unit, transferable, signable end-to-end.</a:t>
+              <a:t>. One release unit, transferable, signable end-to-end.</a:t>
             </a:r>
           </a:p>
         </p:txBody>
@@ -10964,7 +11816,7 @@
                 </a:solidFill>
                 <a:latin typeface="Consolas"/>
               </a:rPr>
-              <a:t># leaf components — carry the artifacts</a:t>
+              <a:t># service components — carry the artifacts</a:t>
             </a:r>
           </a:p>
           <a:p>
@@ -11358,7 +12210,7 @@
                 </a:solidFill>
                 <a:latin typeface="Consolas"/>
               </a:rPr>
-              <a:t>component:</a:t>
+              <a:t>components:</a:t>
             </a:r>
           </a:p>
           <a:p>
@@ -11380,7 +12232,7 @@
                 </a:solidFill>
                 <a:latin typeface="Consolas"/>
               </a:rPr>
-              <a:t>  name: acme.org/sovereign/product</a:t>
+              <a:t>  - name: acme.org/sovereign/product</a:t>
             </a:r>
           </a:p>
           <a:p>
@@ -11402,7 +12254,7 @@
                 </a:solidFill>
                 <a:latin typeface="Consolas"/>
               </a:rPr>
-              <a:t>  version: 1.0.0</a:t>
+              <a:t>    version: 1.0.0</a:t>
             </a:r>
           </a:p>
           <a:p>
@@ -11424,7 +12276,7 @@
                 </a:solidFill>
                 <a:latin typeface="Consolas"/>
               </a:rPr>
-              <a:t>  componentReferences:</a:t>
+              <a:t>    componentReferences:</a:t>
             </a:r>
           </a:p>
           <a:p>
@@ -11446,7 +12298,7 @@
                 </a:solidFill>
                 <a:latin typeface="Consolas"/>
               </a:rPr>
-              <a:t>    - name: notes</a:t>
+              <a:t>      - name: notes</a:t>
             </a:r>
           </a:p>
           <a:p>
@@ -11468,7 +12320,7 @@
                 </a:solidFill>
                 <a:latin typeface="Consolas"/>
               </a:rPr>
-              <a:t>      componentName: acme.org/sovereign/notes</a:t>
+              <a:t>        componentName: acme.org/sovereign/notes</a:t>
             </a:r>
           </a:p>
           <a:p>
@@ -11490,7 +12342,7 @@
                 </a:solidFill>
                 <a:latin typeface="Consolas"/>
               </a:rPr>
-              <a:t>      version: 1.0.0</a:t>
+              <a:t>        version: 1.0.0</a:t>
             </a:r>
           </a:p>
           <a:p>
@@ -11512,7 +12364,7 @@
                 </a:solidFill>
                 <a:latin typeface="Consolas"/>
               </a:rPr>
-              <a:t>    - name: postgres</a:t>
+              <a:t>      - name: postgres</a:t>
             </a:r>
           </a:p>
           <a:p>
@@ -11534,7 +12386,7 @@
                 </a:solidFill>
                 <a:latin typeface="Consolas"/>
               </a:rPr>
-              <a:t>      componentName: acme.org/sovereign/postgres</a:t>
+              <a:t>        componentName: acme.org/sovereign/postgres</a:t>
             </a:r>
           </a:p>
           <a:p>
@@ -11556,7 +12408,7 @@
                 </a:solidFill>
                 <a:latin typeface="Consolas"/>
               </a:rPr>
-              <a:t>      version: 1.0.0</a:t>
+              <a:t>        version: 1.0.0</a:t>
             </a:r>
           </a:p>
           <a:p>
@@ -11613,7 +12465,7 @@
                 </a:solidFill>
                 <a:latin typeface="Aptos"/>
               </a:rPr>
-              <a:t>LEAF</a:t>
+              <a:t>SERVICE</a:t>
             </a:r>
           </a:p>
         </p:txBody>
@@ -11751,7 +12603,7 @@
           <a:lstStyle/>
           <a:p>
             <a:r>
-              <a:t>One signature shape. Three trust models.</a:t>
+              <a:t>Same signed object. Three trust models.</a:t>
             </a:r>
           </a:p>
         </p:txBody>
@@ -11793,12 +12645,12 @@
           <a:lstStyle/>
           <a:p>
             <a:r>
-              <a:t>Your existing PKI.</a:t>
-            </a:r>
-          </a:p>
-          <a:p>
-            <a:r>
-              <a:t>Keys you already rotate.</a:t>
+              <a:t>Bare public-key pinning.</a:t>
+            </a:r>
+          </a:p>
+          <a:p>
+            <a:r>
+              <a:t>The key you already rotate.</a:t>
             </a:r>
           </a:p>
         </p:txBody>
